--- a/ゲーム科1年/00_前期/プログラミングⅡ/16_これまでの課題.pptx
+++ b/ゲーム科1年/00_前期/プログラミングⅡ/16_これまでの課題.pptx
@@ -6,6 +6,9 @@
   </p:sldMasterIdLst>
   <p:sldIdLst>
     <p:sldId id="257" r:id="rId2"/>
+    <p:sldId id="258" r:id="rId3"/>
+    <p:sldId id="259" r:id="rId4"/>
+    <p:sldId id="260" r:id="rId5"/>
   </p:sldIdLst>
   <p:sldSz cx="12192000" cy="6858000"/>
   <p:notesSz cx="6858000" cy="9144000"/>
@@ -259,7 +262,7 @@
           <a:p>
             <a:fld id="{E9CC885B-4903-4D54-9A93-00025F12DED9}" type="datetimeFigureOut">
               <a:rPr kumimoji="1" lang="ja-JP" altLang="en-US" smtClean="0"/>
-              <a:t>2025/4/13</a:t>
+              <a:t>2025/4/16</a:t>
             </a:fld>
             <a:endParaRPr kumimoji="1" lang="ja-JP" altLang="en-US"/>
           </a:p>
@@ -489,7 +492,7 @@
           <a:p>
             <a:fld id="{E9CC885B-4903-4D54-9A93-00025F12DED9}" type="datetimeFigureOut">
               <a:rPr kumimoji="1" lang="ja-JP" altLang="en-US" smtClean="0"/>
-              <a:t>2025/4/13</a:t>
+              <a:t>2025/4/16</a:t>
             </a:fld>
             <a:endParaRPr kumimoji="1" lang="ja-JP" altLang="en-US"/>
           </a:p>
@@ -729,7 +732,7 @@
           <a:p>
             <a:fld id="{E9CC885B-4903-4D54-9A93-00025F12DED9}" type="datetimeFigureOut">
               <a:rPr kumimoji="1" lang="ja-JP" altLang="en-US" smtClean="0"/>
-              <a:t>2025/4/13</a:t>
+              <a:t>2025/4/16</a:t>
             </a:fld>
             <a:endParaRPr kumimoji="1" lang="ja-JP" altLang="en-US"/>
           </a:p>
@@ -959,7 +962,7 @@
           <a:p>
             <a:fld id="{E9CC885B-4903-4D54-9A93-00025F12DED9}" type="datetimeFigureOut">
               <a:rPr kumimoji="1" lang="ja-JP" altLang="en-US" smtClean="0"/>
-              <a:t>2025/4/13</a:t>
+              <a:t>2025/4/16</a:t>
             </a:fld>
             <a:endParaRPr kumimoji="1" lang="ja-JP" altLang="en-US"/>
           </a:p>
@@ -1234,7 +1237,7 @@
           <a:p>
             <a:fld id="{E9CC885B-4903-4D54-9A93-00025F12DED9}" type="datetimeFigureOut">
               <a:rPr kumimoji="1" lang="ja-JP" altLang="en-US" smtClean="0"/>
-              <a:t>2025/4/13</a:t>
+              <a:t>2025/4/16</a:t>
             </a:fld>
             <a:endParaRPr kumimoji="1" lang="ja-JP" altLang="en-US"/>
           </a:p>
@@ -1563,7 +1566,7 @@
           <a:p>
             <a:fld id="{E9CC885B-4903-4D54-9A93-00025F12DED9}" type="datetimeFigureOut">
               <a:rPr kumimoji="1" lang="ja-JP" altLang="en-US" smtClean="0"/>
-              <a:t>2025/4/13</a:t>
+              <a:t>2025/4/16</a:t>
             </a:fld>
             <a:endParaRPr kumimoji="1" lang="ja-JP" altLang="en-US"/>
           </a:p>
@@ -2039,7 +2042,7 @@
           <a:p>
             <a:fld id="{E9CC885B-4903-4D54-9A93-00025F12DED9}" type="datetimeFigureOut">
               <a:rPr kumimoji="1" lang="ja-JP" altLang="en-US" smtClean="0"/>
-              <a:t>2025/4/13</a:t>
+              <a:t>2025/4/16</a:t>
             </a:fld>
             <a:endParaRPr kumimoji="1" lang="ja-JP" altLang="en-US"/>
           </a:p>
@@ -2180,7 +2183,7 @@
           <a:p>
             <a:fld id="{E9CC885B-4903-4D54-9A93-00025F12DED9}" type="datetimeFigureOut">
               <a:rPr kumimoji="1" lang="ja-JP" altLang="en-US" smtClean="0"/>
-              <a:t>2025/4/13</a:t>
+              <a:t>2025/4/16</a:t>
             </a:fld>
             <a:endParaRPr kumimoji="1" lang="ja-JP" altLang="en-US"/>
           </a:p>
@@ -2293,7 +2296,7 @@
           <a:p>
             <a:fld id="{E9CC885B-4903-4D54-9A93-00025F12DED9}" type="datetimeFigureOut">
               <a:rPr kumimoji="1" lang="ja-JP" altLang="en-US" smtClean="0"/>
-              <a:t>2025/4/13</a:t>
+              <a:t>2025/4/16</a:t>
             </a:fld>
             <a:endParaRPr kumimoji="1" lang="ja-JP" altLang="en-US"/>
           </a:p>
@@ -2636,7 +2639,7 @@
           <a:p>
             <a:fld id="{E9CC885B-4903-4D54-9A93-00025F12DED9}" type="datetimeFigureOut">
               <a:rPr kumimoji="1" lang="ja-JP" altLang="en-US" smtClean="0"/>
-              <a:t>2025/4/13</a:t>
+              <a:t>2025/4/16</a:t>
             </a:fld>
             <a:endParaRPr kumimoji="1" lang="ja-JP" altLang="en-US"/>
           </a:p>
@@ -2924,7 +2927,7 @@
           <a:p>
             <a:fld id="{E9CC885B-4903-4D54-9A93-00025F12DED9}" type="datetimeFigureOut">
               <a:rPr kumimoji="1" lang="ja-JP" altLang="en-US" smtClean="0"/>
-              <a:t>2025/4/13</a:t>
+              <a:t>2025/4/16</a:t>
             </a:fld>
             <a:endParaRPr kumimoji="1" lang="ja-JP" altLang="en-US"/>
           </a:p>
@@ -3197,7 +3200,7 @@
           <a:p>
             <a:fld id="{E9CC885B-4903-4D54-9A93-00025F12DED9}" type="datetimeFigureOut">
               <a:rPr kumimoji="1" lang="ja-JP" altLang="en-US" smtClean="0"/>
-              <a:t>2025/4/13</a:t>
+              <a:t>2025/4/16</a:t>
             </a:fld>
             <a:endParaRPr kumimoji="1" lang="ja-JP" altLang="en-US"/>
           </a:p>
@@ -3665,7 +3668,7 @@
         <p:spPr>
           <a:xfrm>
             <a:off x="567542" y="1189161"/>
-            <a:ext cx="11325536" cy="830997"/>
+            <a:ext cx="11325536" cy="3416320"/>
           </a:xfrm>
           <a:prstGeom prst="rect">
             <a:avLst/>
@@ -3694,8 +3697,61 @@
           </a:p>
           <a:p>
             <a:r>
-              <a:rPr lang="ja-JP" altLang="en-US" sz="2400"/>
-              <a:t>詳細な動作はサンプルを確認しながら実装しましょう。</a:t>
+              <a:rPr lang="ja-JP" altLang="en-US" sz="2400" dirty="0"/>
+              <a:t>仕様は以下の通りです。</a:t>
+            </a:r>
+            <a:endParaRPr lang="en-US" altLang="ja-JP" sz="2400" dirty="0"/>
+          </a:p>
+          <a:p>
+            <a:endParaRPr lang="en-US" altLang="ja-JP" sz="2400" dirty="0"/>
+          </a:p>
+          <a:p>
+            <a:r>
+              <a:rPr lang="ja-JP" altLang="en-US" sz="2400" b="1" dirty="0">
+                <a:solidFill>
+                  <a:srgbClr val="FF0000"/>
+                </a:solidFill>
+              </a:rPr>
+              <a:t>■仕様</a:t>
+            </a:r>
+            <a:endParaRPr lang="en-US" altLang="ja-JP" sz="2400" b="1" dirty="0">
+              <a:solidFill>
+                <a:srgbClr val="FF0000"/>
+              </a:solidFill>
+            </a:endParaRPr>
+          </a:p>
+          <a:p>
+            <a:r>
+              <a:rPr lang="ja-JP" altLang="en-US" sz="2400" dirty="0"/>
+              <a:t>・各モードについて</a:t>
+            </a:r>
+            <a:endParaRPr lang="en-US" altLang="ja-JP" sz="2400" dirty="0"/>
+          </a:p>
+          <a:p>
+            <a:r>
+              <a:rPr lang="ja-JP" altLang="en-US" sz="2400" dirty="0"/>
+              <a:t>　・口座開設モード</a:t>
+            </a:r>
+            <a:endParaRPr lang="en-US" altLang="ja-JP" sz="2400" dirty="0"/>
+          </a:p>
+          <a:p>
+            <a:r>
+              <a:rPr lang="ja-JP" altLang="en-US" sz="2400" dirty="0"/>
+              <a:t>　・預入モード</a:t>
+            </a:r>
+            <a:endParaRPr lang="en-US" altLang="ja-JP" sz="2400" dirty="0"/>
+          </a:p>
+          <a:p>
+            <a:r>
+              <a:rPr lang="ja-JP" altLang="en-US" sz="2400" dirty="0"/>
+              <a:t>　・引出モード</a:t>
+            </a:r>
+            <a:endParaRPr lang="en-US" altLang="ja-JP" sz="2400" dirty="0"/>
+          </a:p>
+          <a:p>
+            <a:r>
+              <a:rPr lang="ja-JP" altLang="en-US" sz="2400" dirty="0"/>
+              <a:t>最初に数字を入力させて対応したモードで次の処理に進む</a:t>
             </a:r>
             <a:endParaRPr lang="en-US" altLang="ja-JP" sz="2400" dirty="0"/>
           </a:p>
@@ -3705,6 +3761,494 @@
     <p:extLst>
       <p:ext uri="{BB962C8B-B14F-4D97-AF65-F5344CB8AC3E}">
         <p14:creationId xmlns:p14="http://schemas.microsoft.com/office/powerpoint/2010/main" val="4044318111"/>
+      </p:ext>
+    </p:extLst>
+  </p:cSld>
+  <p:clrMapOvr>
+    <a:masterClrMapping/>
+  </p:clrMapOvr>
+</p:sld>
+</file>
+
+<file path=ppt/slides/slide2.xml><?xml version="1.0" encoding="utf-8"?>
+<p:sld xmlns:a="http://schemas.openxmlformats.org/drawingml/2006/main" xmlns:r="http://schemas.openxmlformats.org/officeDocument/2006/relationships" xmlns:p="http://schemas.openxmlformats.org/presentationml/2006/main">
+  <p:cSld>
+    <p:spTree>
+      <p:nvGrpSpPr>
+        <p:cNvPr id="1" name=""/>
+        <p:cNvGrpSpPr/>
+        <p:nvPr/>
+      </p:nvGrpSpPr>
+      <p:grpSpPr>
+        <a:xfrm>
+          <a:off x="0" y="0"/>
+          <a:ext cx="0" cy="0"/>
+          <a:chOff x="0" y="0"/>
+          <a:chExt cx="0" cy="0"/>
+        </a:xfrm>
+      </p:grpSpPr>
+      <p:sp>
+        <p:nvSpPr>
+          <p:cNvPr id="4" name="テキスト ボックス 3">
+            <a:extLst>
+              <a:ext uri="{FF2B5EF4-FFF2-40B4-BE49-F238E27FC236}">
+                <a16:creationId xmlns:a16="http://schemas.microsoft.com/office/drawing/2014/main" id="{5A13BF46-B8C5-48AA-8308-C9ECFF431A18}"/>
+              </a:ext>
+            </a:extLst>
+          </p:cNvPr>
+          <p:cNvSpPr txBox="1"/>
+          <p:nvPr/>
+        </p:nvSpPr>
+        <p:spPr>
+          <a:xfrm>
+            <a:off x="567542" y="491954"/>
+            <a:ext cx="3057247" cy="584775"/>
+          </a:xfrm>
+          <a:prstGeom prst="rect">
+            <a:avLst/>
+          </a:prstGeom>
+          <a:noFill/>
+        </p:spPr>
+        <p:txBody>
+          <a:bodyPr wrap="none" rtlCol="0">
+            <a:spAutoFit/>
+          </a:bodyPr>
+          <a:lstStyle/>
+          <a:p>
+            <a:r>
+              <a:rPr lang="ja-JP" altLang="en-US" sz="3200" b="1" u="sng" dirty="0"/>
+              <a:t>これまでの課題</a:t>
+            </a:r>
+            <a:endParaRPr kumimoji="1" lang="ja-JP" altLang="en-US" sz="3200" b="1" u="sng" dirty="0"/>
+          </a:p>
+        </p:txBody>
+      </p:sp>
+      <p:sp>
+        <p:nvSpPr>
+          <p:cNvPr id="9" name="テキスト ボックス 8">
+            <a:extLst>
+              <a:ext uri="{FF2B5EF4-FFF2-40B4-BE49-F238E27FC236}">
+                <a16:creationId xmlns:a16="http://schemas.microsoft.com/office/drawing/2014/main" id="{80F412F9-EC22-472D-8334-55F86CA5630B}"/>
+              </a:ext>
+            </a:extLst>
+          </p:cNvPr>
+          <p:cNvSpPr txBox="1"/>
+          <p:nvPr/>
+        </p:nvSpPr>
+        <p:spPr>
+          <a:xfrm>
+            <a:off x="567542" y="1189161"/>
+            <a:ext cx="11325536" cy="3046988"/>
+          </a:xfrm>
+          <a:prstGeom prst="rect">
+            <a:avLst/>
+          </a:prstGeom>
+          <a:noFill/>
+        </p:spPr>
+        <p:txBody>
+          <a:bodyPr wrap="none" rtlCol="0">
+            <a:spAutoFit/>
+          </a:bodyPr>
+          <a:lstStyle/>
+          <a:p>
+            <a:r>
+              <a:rPr lang="ja-JP" altLang="en-US" sz="2400" dirty="0"/>
+              <a:t>これまで学習したことを振り返りながら、簡単な</a:t>
+            </a:r>
+            <a:r>
+              <a:rPr lang="en-US" altLang="ja-JP" sz="2400" dirty="0"/>
+              <a:t>ATM</a:t>
+            </a:r>
+            <a:r>
+              <a:rPr lang="ja-JP" altLang="en-US" sz="2400" dirty="0"/>
+              <a:t>システムを作りましょう。</a:t>
+            </a:r>
+            <a:endParaRPr lang="en-US" altLang="ja-JP" sz="2400" dirty="0"/>
+          </a:p>
+          <a:p>
+            <a:r>
+              <a:rPr lang="ja-JP" altLang="en-US" sz="2400" dirty="0"/>
+              <a:t>仕様は以下の通りです。</a:t>
+            </a:r>
+            <a:endParaRPr lang="en-US" altLang="ja-JP" sz="2400" dirty="0"/>
+          </a:p>
+          <a:p>
+            <a:endParaRPr lang="en-US" altLang="ja-JP" sz="2400" dirty="0"/>
+          </a:p>
+          <a:p>
+            <a:r>
+              <a:rPr lang="ja-JP" altLang="en-US" sz="2400" b="1" dirty="0">
+                <a:solidFill>
+                  <a:srgbClr val="FF0000"/>
+                </a:solidFill>
+              </a:rPr>
+              <a:t>■仕様（その２）</a:t>
+            </a:r>
+            <a:endParaRPr lang="en-US" altLang="ja-JP" sz="2400" b="1" dirty="0">
+              <a:solidFill>
+                <a:srgbClr val="FF0000"/>
+              </a:solidFill>
+            </a:endParaRPr>
+          </a:p>
+          <a:p>
+            <a:r>
+              <a:rPr lang="ja-JP" altLang="en-US" sz="2400" dirty="0"/>
+              <a:t>・口座開設モード</a:t>
+            </a:r>
+            <a:endParaRPr lang="en-US" altLang="ja-JP" sz="2400" dirty="0"/>
+          </a:p>
+          <a:p>
+            <a:r>
+              <a:rPr lang="ja-JP" altLang="en-US" sz="2400" dirty="0"/>
+              <a:t>　講座名と暗証番号を設定させる。</a:t>
+            </a:r>
+            <a:endParaRPr lang="en-US" altLang="ja-JP" sz="2400" dirty="0"/>
+          </a:p>
+          <a:p>
+            <a:r>
+              <a:rPr lang="ja-JP" altLang="en-US" sz="2400" dirty="0"/>
+              <a:t>　暗証番号は数字４桁で設定する。</a:t>
+            </a:r>
+            <a:endParaRPr lang="en-US" altLang="ja-JP" sz="2400" dirty="0"/>
+          </a:p>
+          <a:p>
+            <a:r>
+              <a:rPr lang="ja-JP" altLang="en-US" sz="2400" dirty="0"/>
+              <a:t>　設定できないものが入力された場合は設定しない。</a:t>
+            </a:r>
+            <a:endParaRPr lang="en-US" altLang="ja-JP" sz="2400" dirty="0"/>
+          </a:p>
+        </p:txBody>
+      </p:sp>
+    </p:spTree>
+    <p:extLst>
+      <p:ext uri="{BB962C8B-B14F-4D97-AF65-F5344CB8AC3E}">
+        <p14:creationId xmlns:p14="http://schemas.microsoft.com/office/powerpoint/2010/main" val="2401929460"/>
+      </p:ext>
+    </p:extLst>
+  </p:cSld>
+  <p:clrMapOvr>
+    <a:masterClrMapping/>
+  </p:clrMapOvr>
+</p:sld>
+</file>
+
+<file path=ppt/slides/slide3.xml><?xml version="1.0" encoding="utf-8"?>
+<p:sld xmlns:a="http://schemas.openxmlformats.org/drawingml/2006/main" xmlns:r="http://schemas.openxmlformats.org/officeDocument/2006/relationships" xmlns:p="http://schemas.openxmlformats.org/presentationml/2006/main">
+  <p:cSld>
+    <p:spTree>
+      <p:nvGrpSpPr>
+        <p:cNvPr id="1" name=""/>
+        <p:cNvGrpSpPr/>
+        <p:nvPr/>
+      </p:nvGrpSpPr>
+      <p:grpSpPr>
+        <a:xfrm>
+          <a:off x="0" y="0"/>
+          <a:ext cx="0" cy="0"/>
+          <a:chOff x="0" y="0"/>
+          <a:chExt cx="0" cy="0"/>
+        </a:xfrm>
+      </p:grpSpPr>
+      <p:sp>
+        <p:nvSpPr>
+          <p:cNvPr id="4" name="テキスト ボックス 3">
+            <a:extLst>
+              <a:ext uri="{FF2B5EF4-FFF2-40B4-BE49-F238E27FC236}">
+                <a16:creationId xmlns:a16="http://schemas.microsoft.com/office/drawing/2014/main" id="{5A13BF46-B8C5-48AA-8308-C9ECFF431A18}"/>
+              </a:ext>
+            </a:extLst>
+          </p:cNvPr>
+          <p:cNvSpPr txBox="1"/>
+          <p:nvPr/>
+        </p:nvSpPr>
+        <p:spPr>
+          <a:xfrm>
+            <a:off x="567542" y="491954"/>
+            <a:ext cx="3057247" cy="584775"/>
+          </a:xfrm>
+          <a:prstGeom prst="rect">
+            <a:avLst/>
+          </a:prstGeom>
+          <a:noFill/>
+        </p:spPr>
+        <p:txBody>
+          <a:bodyPr wrap="none" rtlCol="0">
+            <a:spAutoFit/>
+          </a:bodyPr>
+          <a:lstStyle/>
+          <a:p>
+            <a:r>
+              <a:rPr lang="ja-JP" altLang="en-US" sz="3200" b="1" u="sng" dirty="0"/>
+              <a:t>これまでの課題</a:t>
+            </a:r>
+            <a:endParaRPr kumimoji="1" lang="ja-JP" altLang="en-US" sz="3200" b="1" u="sng" dirty="0"/>
+          </a:p>
+        </p:txBody>
+      </p:sp>
+      <p:sp>
+        <p:nvSpPr>
+          <p:cNvPr id="9" name="テキスト ボックス 8">
+            <a:extLst>
+              <a:ext uri="{FF2B5EF4-FFF2-40B4-BE49-F238E27FC236}">
+                <a16:creationId xmlns:a16="http://schemas.microsoft.com/office/drawing/2014/main" id="{80F412F9-EC22-472D-8334-55F86CA5630B}"/>
+              </a:ext>
+            </a:extLst>
+          </p:cNvPr>
+          <p:cNvSpPr txBox="1"/>
+          <p:nvPr/>
+        </p:nvSpPr>
+        <p:spPr>
+          <a:xfrm>
+            <a:off x="567542" y="1189161"/>
+            <a:ext cx="11325536" cy="2677656"/>
+          </a:xfrm>
+          <a:prstGeom prst="rect">
+            <a:avLst/>
+          </a:prstGeom>
+          <a:noFill/>
+        </p:spPr>
+        <p:txBody>
+          <a:bodyPr wrap="none" rtlCol="0">
+            <a:spAutoFit/>
+          </a:bodyPr>
+          <a:lstStyle/>
+          <a:p>
+            <a:r>
+              <a:rPr lang="ja-JP" altLang="en-US" sz="2400" dirty="0"/>
+              <a:t>これまで学習したことを振り返りながら、簡単な</a:t>
+            </a:r>
+            <a:r>
+              <a:rPr lang="en-US" altLang="ja-JP" sz="2400" dirty="0"/>
+              <a:t>ATM</a:t>
+            </a:r>
+            <a:r>
+              <a:rPr lang="ja-JP" altLang="en-US" sz="2400" dirty="0"/>
+              <a:t>システムを作りましょう。</a:t>
+            </a:r>
+            <a:endParaRPr lang="en-US" altLang="ja-JP" sz="2400" dirty="0"/>
+          </a:p>
+          <a:p>
+            <a:r>
+              <a:rPr lang="ja-JP" altLang="en-US" sz="2400" dirty="0"/>
+              <a:t>仕様は以下の通りです。</a:t>
+            </a:r>
+            <a:endParaRPr lang="en-US" altLang="ja-JP" sz="2400" dirty="0"/>
+          </a:p>
+          <a:p>
+            <a:endParaRPr lang="en-US" altLang="ja-JP" sz="2400" dirty="0"/>
+          </a:p>
+          <a:p>
+            <a:r>
+              <a:rPr lang="ja-JP" altLang="en-US" sz="2400" b="1" dirty="0">
+                <a:solidFill>
+                  <a:srgbClr val="FF0000"/>
+                </a:solidFill>
+              </a:rPr>
+              <a:t>■仕様（その３）</a:t>
+            </a:r>
+            <a:endParaRPr lang="en-US" altLang="ja-JP" sz="2400" b="1" dirty="0">
+              <a:solidFill>
+                <a:srgbClr val="FF0000"/>
+              </a:solidFill>
+            </a:endParaRPr>
+          </a:p>
+          <a:p>
+            <a:r>
+              <a:rPr lang="ja-JP" altLang="en-US" sz="2400" dirty="0"/>
+              <a:t>・預入モード</a:t>
+            </a:r>
+            <a:endParaRPr lang="en-US" altLang="ja-JP" sz="2400" dirty="0"/>
+          </a:p>
+          <a:p>
+            <a:r>
+              <a:rPr lang="ja-JP" altLang="en-US" sz="2400" dirty="0"/>
+              <a:t>　暗証番号を入力した口座に金額を加算する。</a:t>
+            </a:r>
+            <a:endParaRPr lang="en-US" altLang="ja-JP" sz="2400" dirty="0"/>
+          </a:p>
+          <a:p>
+            <a:r>
+              <a:rPr lang="ja-JP" altLang="en-US" sz="2400" dirty="0"/>
+              <a:t>　暗証番号がどの口座にも当てはまらない場合はモード選択まで戻る。</a:t>
+            </a:r>
+            <a:endParaRPr lang="en-US" altLang="ja-JP" sz="2400" dirty="0"/>
+          </a:p>
+        </p:txBody>
+      </p:sp>
+    </p:spTree>
+    <p:extLst>
+      <p:ext uri="{BB962C8B-B14F-4D97-AF65-F5344CB8AC3E}">
+        <p14:creationId xmlns:p14="http://schemas.microsoft.com/office/powerpoint/2010/main" val="1698956753"/>
+      </p:ext>
+    </p:extLst>
+  </p:cSld>
+  <p:clrMapOvr>
+    <a:masterClrMapping/>
+  </p:clrMapOvr>
+</p:sld>
+</file>
+
+<file path=ppt/slides/slide4.xml><?xml version="1.0" encoding="utf-8"?>
+<p:sld xmlns:a="http://schemas.openxmlformats.org/drawingml/2006/main" xmlns:r="http://schemas.openxmlformats.org/officeDocument/2006/relationships" xmlns:p="http://schemas.openxmlformats.org/presentationml/2006/main">
+  <p:cSld>
+    <p:spTree>
+      <p:nvGrpSpPr>
+        <p:cNvPr id="1" name=""/>
+        <p:cNvGrpSpPr/>
+        <p:nvPr/>
+      </p:nvGrpSpPr>
+      <p:grpSpPr>
+        <a:xfrm>
+          <a:off x="0" y="0"/>
+          <a:ext cx="0" cy="0"/>
+          <a:chOff x="0" y="0"/>
+          <a:chExt cx="0" cy="0"/>
+        </a:xfrm>
+      </p:grpSpPr>
+      <p:sp>
+        <p:nvSpPr>
+          <p:cNvPr id="4" name="テキスト ボックス 3">
+            <a:extLst>
+              <a:ext uri="{FF2B5EF4-FFF2-40B4-BE49-F238E27FC236}">
+                <a16:creationId xmlns:a16="http://schemas.microsoft.com/office/drawing/2014/main" id="{5A13BF46-B8C5-48AA-8308-C9ECFF431A18}"/>
+              </a:ext>
+            </a:extLst>
+          </p:cNvPr>
+          <p:cNvSpPr txBox="1"/>
+          <p:nvPr/>
+        </p:nvSpPr>
+        <p:spPr>
+          <a:xfrm>
+            <a:off x="567542" y="491954"/>
+            <a:ext cx="3057247" cy="584775"/>
+          </a:xfrm>
+          <a:prstGeom prst="rect">
+            <a:avLst/>
+          </a:prstGeom>
+          <a:noFill/>
+        </p:spPr>
+        <p:txBody>
+          <a:bodyPr wrap="none" rtlCol="0">
+            <a:spAutoFit/>
+          </a:bodyPr>
+          <a:lstStyle/>
+          <a:p>
+            <a:r>
+              <a:rPr lang="ja-JP" altLang="en-US" sz="3200" b="1" u="sng" dirty="0"/>
+              <a:t>これまでの課題</a:t>
+            </a:r>
+            <a:endParaRPr kumimoji="1" lang="ja-JP" altLang="en-US" sz="3200" b="1" u="sng" dirty="0"/>
+          </a:p>
+        </p:txBody>
+      </p:sp>
+      <p:sp>
+        <p:nvSpPr>
+          <p:cNvPr id="9" name="テキスト ボックス 8">
+            <a:extLst>
+              <a:ext uri="{FF2B5EF4-FFF2-40B4-BE49-F238E27FC236}">
+                <a16:creationId xmlns:a16="http://schemas.microsoft.com/office/drawing/2014/main" id="{80F412F9-EC22-472D-8334-55F86CA5630B}"/>
+              </a:ext>
+            </a:extLst>
+          </p:cNvPr>
+          <p:cNvSpPr txBox="1"/>
+          <p:nvPr/>
+        </p:nvSpPr>
+        <p:spPr>
+          <a:xfrm>
+            <a:off x="567542" y="1189161"/>
+            <a:ext cx="11325536" cy="3785652"/>
+          </a:xfrm>
+          <a:prstGeom prst="rect">
+            <a:avLst/>
+          </a:prstGeom>
+          <a:noFill/>
+        </p:spPr>
+        <p:txBody>
+          <a:bodyPr wrap="none" rtlCol="0">
+            <a:spAutoFit/>
+          </a:bodyPr>
+          <a:lstStyle/>
+          <a:p>
+            <a:r>
+              <a:rPr lang="ja-JP" altLang="en-US" sz="2400" dirty="0"/>
+              <a:t>これまで学習したことを振り返りながら、簡単な</a:t>
+            </a:r>
+            <a:r>
+              <a:rPr lang="en-US" altLang="ja-JP" sz="2400" dirty="0"/>
+              <a:t>ATM</a:t>
+            </a:r>
+            <a:r>
+              <a:rPr lang="ja-JP" altLang="en-US" sz="2400" dirty="0"/>
+              <a:t>システムを作りましょう。</a:t>
+            </a:r>
+            <a:endParaRPr lang="en-US" altLang="ja-JP" sz="2400" dirty="0"/>
+          </a:p>
+          <a:p>
+            <a:r>
+              <a:rPr lang="ja-JP" altLang="en-US" sz="2400" dirty="0"/>
+              <a:t>仕様は以下の通りです。</a:t>
+            </a:r>
+            <a:endParaRPr lang="en-US" altLang="ja-JP" sz="2400" dirty="0"/>
+          </a:p>
+          <a:p>
+            <a:endParaRPr lang="en-US" altLang="ja-JP" sz="2400" dirty="0"/>
+          </a:p>
+          <a:p>
+            <a:r>
+              <a:rPr lang="ja-JP" altLang="en-US" sz="2400" b="1" dirty="0">
+                <a:solidFill>
+                  <a:srgbClr val="FF0000"/>
+                </a:solidFill>
+              </a:rPr>
+              <a:t>■仕様（その４）</a:t>
+            </a:r>
+            <a:endParaRPr lang="en-US" altLang="ja-JP" sz="2400" b="1" dirty="0">
+              <a:solidFill>
+                <a:srgbClr val="FF0000"/>
+              </a:solidFill>
+            </a:endParaRPr>
+          </a:p>
+          <a:p>
+            <a:r>
+              <a:rPr lang="ja-JP" altLang="en-US" sz="2400" dirty="0"/>
+              <a:t>・引出モード</a:t>
+            </a:r>
+            <a:endParaRPr lang="en-US" altLang="ja-JP" sz="2400" dirty="0"/>
+          </a:p>
+          <a:p>
+            <a:r>
+              <a:rPr lang="ja-JP" altLang="en-US" sz="2400" dirty="0"/>
+              <a:t>　暗証番号を入力した口座から指定した金額を減算する。</a:t>
+            </a:r>
+            <a:endParaRPr lang="en-US" altLang="ja-JP" sz="2400" dirty="0"/>
+          </a:p>
+          <a:p>
+            <a:r>
+              <a:rPr lang="ja-JP" altLang="en-US" sz="2400" dirty="0"/>
+              <a:t>　暗証番号がどの口座にも当てはまらない場合はモード選択まで戻る。</a:t>
+            </a:r>
+            <a:endParaRPr lang="en-US" altLang="ja-JP" sz="2400" dirty="0"/>
+          </a:p>
+          <a:p>
+            <a:endParaRPr lang="en-US" altLang="ja-JP" sz="2400" dirty="0"/>
+          </a:p>
+          <a:p>
+            <a:endParaRPr lang="en-US" altLang="ja-JP" sz="2400" dirty="0"/>
+          </a:p>
+          <a:p>
+            <a:r>
+              <a:rPr lang="ja-JP" altLang="en-US" sz="2400"/>
+              <a:t>そのほか詳細な動作はサンプルを確認しましょう。</a:t>
+            </a:r>
+            <a:endParaRPr lang="en-US" altLang="ja-JP" sz="2400" dirty="0"/>
+          </a:p>
+        </p:txBody>
+      </p:sp>
+    </p:spTree>
+    <p:extLst>
+      <p:ext uri="{BB962C8B-B14F-4D97-AF65-F5344CB8AC3E}">
+        <p14:creationId xmlns:p14="http://schemas.microsoft.com/office/powerpoint/2010/main" val="1208416802"/>
       </p:ext>
     </p:extLst>
   </p:cSld>

--- a/ゲーム科1年/00_前期/プログラミングⅡ/16_これまでの課題.pptx
+++ b/ゲーム科1年/00_前期/プログラミングⅡ/16_これまでの課題.pptx
@@ -262,7 +262,7 @@
           <a:p>
             <a:fld id="{E9CC885B-4903-4D54-9A93-00025F12DED9}" type="datetimeFigureOut">
               <a:rPr kumimoji="1" lang="ja-JP" altLang="en-US" smtClean="0"/>
-              <a:t>2025/4/16</a:t>
+              <a:t>2026/6/2</a:t>
             </a:fld>
             <a:endParaRPr kumimoji="1" lang="ja-JP" altLang="en-US"/>
           </a:p>
@@ -492,7 +492,7 @@
           <a:p>
             <a:fld id="{E9CC885B-4903-4D54-9A93-00025F12DED9}" type="datetimeFigureOut">
               <a:rPr kumimoji="1" lang="ja-JP" altLang="en-US" smtClean="0"/>
-              <a:t>2025/4/16</a:t>
+              <a:t>2026/6/2</a:t>
             </a:fld>
             <a:endParaRPr kumimoji="1" lang="ja-JP" altLang="en-US"/>
           </a:p>
@@ -732,7 +732,7 @@
           <a:p>
             <a:fld id="{E9CC885B-4903-4D54-9A93-00025F12DED9}" type="datetimeFigureOut">
               <a:rPr kumimoji="1" lang="ja-JP" altLang="en-US" smtClean="0"/>
-              <a:t>2025/4/16</a:t>
+              <a:t>2026/6/2</a:t>
             </a:fld>
             <a:endParaRPr kumimoji="1" lang="ja-JP" altLang="en-US"/>
           </a:p>
@@ -962,7 +962,7 @@
           <a:p>
             <a:fld id="{E9CC885B-4903-4D54-9A93-00025F12DED9}" type="datetimeFigureOut">
               <a:rPr kumimoji="1" lang="ja-JP" altLang="en-US" smtClean="0"/>
-              <a:t>2025/4/16</a:t>
+              <a:t>2026/6/2</a:t>
             </a:fld>
             <a:endParaRPr kumimoji="1" lang="ja-JP" altLang="en-US"/>
           </a:p>
@@ -1237,7 +1237,7 @@
           <a:p>
             <a:fld id="{E9CC885B-4903-4D54-9A93-00025F12DED9}" type="datetimeFigureOut">
               <a:rPr kumimoji="1" lang="ja-JP" altLang="en-US" smtClean="0"/>
-              <a:t>2025/4/16</a:t>
+              <a:t>2026/6/2</a:t>
             </a:fld>
             <a:endParaRPr kumimoji="1" lang="ja-JP" altLang="en-US"/>
           </a:p>
@@ -1566,7 +1566,7 @@
           <a:p>
             <a:fld id="{E9CC885B-4903-4D54-9A93-00025F12DED9}" type="datetimeFigureOut">
               <a:rPr kumimoji="1" lang="ja-JP" altLang="en-US" smtClean="0"/>
-              <a:t>2025/4/16</a:t>
+              <a:t>2026/6/2</a:t>
             </a:fld>
             <a:endParaRPr kumimoji="1" lang="ja-JP" altLang="en-US"/>
           </a:p>
@@ -2042,7 +2042,7 @@
           <a:p>
             <a:fld id="{E9CC885B-4903-4D54-9A93-00025F12DED9}" type="datetimeFigureOut">
               <a:rPr kumimoji="1" lang="ja-JP" altLang="en-US" smtClean="0"/>
-              <a:t>2025/4/16</a:t>
+              <a:t>2026/6/2</a:t>
             </a:fld>
             <a:endParaRPr kumimoji="1" lang="ja-JP" altLang="en-US"/>
           </a:p>
@@ -2183,7 +2183,7 @@
           <a:p>
             <a:fld id="{E9CC885B-4903-4D54-9A93-00025F12DED9}" type="datetimeFigureOut">
               <a:rPr kumimoji="1" lang="ja-JP" altLang="en-US" smtClean="0"/>
-              <a:t>2025/4/16</a:t>
+              <a:t>2026/6/2</a:t>
             </a:fld>
             <a:endParaRPr kumimoji="1" lang="ja-JP" altLang="en-US"/>
           </a:p>
@@ -2296,7 +2296,7 @@
           <a:p>
             <a:fld id="{E9CC885B-4903-4D54-9A93-00025F12DED9}" type="datetimeFigureOut">
               <a:rPr kumimoji="1" lang="ja-JP" altLang="en-US" smtClean="0"/>
-              <a:t>2025/4/16</a:t>
+              <a:t>2026/6/2</a:t>
             </a:fld>
             <a:endParaRPr kumimoji="1" lang="ja-JP" altLang="en-US"/>
           </a:p>
@@ -2639,7 +2639,7 @@
           <a:p>
             <a:fld id="{E9CC885B-4903-4D54-9A93-00025F12DED9}" type="datetimeFigureOut">
               <a:rPr kumimoji="1" lang="ja-JP" altLang="en-US" smtClean="0"/>
-              <a:t>2025/4/16</a:t>
+              <a:t>2026/6/2</a:t>
             </a:fld>
             <a:endParaRPr kumimoji="1" lang="ja-JP" altLang="en-US"/>
           </a:p>
@@ -2927,7 +2927,7 @@
           <a:p>
             <a:fld id="{E9CC885B-4903-4D54-9A93-00025F12DED9}" type="datetimeFigureOut">
               <a:rPr kumimoji="1" lang="ja-JP" altLang="en-US" smtClean="0"/>
-              <a:t>2025/4/16</a:t>
+              <a:t>2026/6/2</a:t>
             </a:fld>
             <a:endParaRPr kumimoji="1" lang="ja-JP" altLang="en-US"/>
           </a:p>
@@ -3200,7 +3200,7 @@
           <a:p>
             <a:fld id="{E9CC885B-4903-4D54-9A93-00025F12DED9}" type="datetimeFigureOut">
               <a:rPr kumimoji="1" lang="ja-JP" altLang="en-US" smtClean="0"/>
-              <a:t>2025/4/16</a:t>
+              <a:t>2026/6/2</a:t>
             </a:fld>
             <a:endParaRPr kumimoji="1" lang="ja-JP" altLang="en-US"/>
           </a:p>
@@ -3668,7 +3668,7 @@
         <p:spPr>
           <a:xfrm>
             <a:off x="567542" y="1189161"/>
-            <a:ext cx="11325536" cy="3416320"/>
+            <a:ext cx="8494633" cy="3416320"/>
           </a:xfrm>
           <a:prstGeom prst="rect">
             <a:avLst/>
@@ -3683,27 +3683,24 @@
           <a:p>
             <a:r>
               <a:rPr lang="ja-JP" altLang="en-US" sz="2400" dirty="0"/>
-              <a:t>これまで学習したことを振り返りながら、簡単な</a:t>
+              <a:t>これまでの学習を活かしてして〇</a:t>
             </a:r>
             <a:r>
               <a:rPr lang="en-US" altLang="ja-JP" sz="2400" dirty="0"/>
-              <a:t>ATM</a:t>
+              <a:t>×</a:t>
             </a:r>
             <a:r>
               <a:rPr lang="ja-JP" altLang="en-US" sz="2400" dirty="0"/>
-              <a:t>システムを作りましょう。</a:t>
+              <a:t>ゲームを作りましょう。</a:t>
             </a:r>
             <a:endParaRPr lang="en-US" altLang="ja-JP" sz="2400" dirty="0"/>
           </a:p>
           <a:p>
-            <a:r>
-              <a:rPr lang="ja-JP" altLang="en-US" sz="2400" dirty="0"/>
-              <a:t>仕様は以下の通りです。</a:t>
-            </a:r>
-            <a:endParaRPr lang="en-US" altLang="ja-JP" sz="2400" dirty="0"/>
-          </a:p>
-          <a:p>
-            <a:endParaRPr lang="en-US" altLang="ja-JP" sz="2400" dirty="0"/>
+            <a:endParaRPr lang="en-US" altLang="ja-JP" sz="2400" b="1" dirty="0">
+              <a:solidFill>
+                <a:srgbClr val="FF0000"/>
+              </a:solidFill>
+            </a:endParaRPr>
           </a:p>
           <a:p>
             <a:r>
@@ -3712,7 +3709,23 @@
                   <a:srgbClr val="FF0000"/>
                 </a:solidFill>
               </a:rPr>
-              <a:t>■仕様</a:t>
+              <a:t>■〇</a:t>
+            </a:r>
+            <a:r>
+              <a:rPr lang="en-US" altLang="ja-JP" sz="2400" b="1" dirty="0">
+                <a:solidFill>
+                  <a:srgbClr val="FF0000"/>
+                </a:solidFill>
+              </a:rPr>
+              <a:t>×</a:t>
+            </a:r>
+            <a:r>
+              <a:rPr lang="ja-JP" altLang="en-US" sz="2400" b="1" dirty="0">
+                <a:solidFill>
+                  <a:srgbClr val="FF0000"/>
+                </a:solidFill>
+              </a:rPr>
+              <a:t>ゲームとは</a:t>
             </a:r>
             <a:endParaRPr lang="en-US" altLang="ja-JP" sz="2400" b="1" dirty="0">
               <a:solidFill>
@@ -3723,35 +3736,62 @@
           <a:p>
             <a:r>
               <a:rPr lang="ja-JP" altLang="en-US" sz="2400" dirty="0"/>
-              <a:t>・各モードについて</a:t>
+              <a:t>・二人対戦</a:t>
             </a:r>
             <a:endParaRPr lang="en-US" altLang="ja-JP" sz="2400" dirty="0"/>
           </a:p>
           <a:p>
             <a:r>
               <a:rPr lang="ja-JP" altLang="en-US" sz="2400" dirty="0"/>
-              <a:t>　・口座開設モード</a:t>
+              <a:t>・先攻は〇、後攻は</a:t>
+            </a:r>
+            <a:r>
+              <a:rPr lang="en-US" altLang="ja-JP" sz="2400" dirty="0"/>
+              <a:t>×</a:t>
+            </a:r>
+            <a:r>
+              <a:rPr lang="ja-JP" altLang="en-US" sz="2400" dirty="0"/>
+              <a:t>を３</a:t>
+            </a:r>
+            <a:r>
+              <a:rPr lang="en-US" altLang="ja-JP" sz="2400" dirty="0"/>
+              <a:t>x</a:t>
+            </a:r>
+            <a:r>
+              <a:rPr lang="ja-JP" altLang="en-US" sz="2400" dirty="0"/>
+              <a:t>３の盤面に書く</a:t>
             </a:r>
             <a:endParaRPr lang="en-US" altLang="ja-JP" sz="2400" dirty="0"/>
           </a:p>
           <a:p>
             <a:r>
               <a:rPr lang="ja-JP" altLang="en-US" sz="2400" dirty="0"/>
-              <a:t>　・預入モード</a:t>
+              <a:t>・縦横斜めにマークを揃えたら勝ち</a:t>
             </a:r>
             <a:endParaRPr lang="en-US" altLang="ja-JP" sz="2400" dirty="0"/>
           </a:p>
           <a:p>
+            <a:endParaRPr lang="en-US" altLang="ja-JP" sz="2400" dirty="0"/>
+          </a:p>
+          <a:p>
             <a:r>
               <a:rPr lang="ja-JP" altLang="en-US" sz="2400" dirty="0"/>
-              <a:t>　・引出モード</a:t>
+              <a:t>完成例を</a:t>
+            </a:r>
+            <a:r>
+              <a:rPr lang="en-US" altLang="ja-JP" sz="2400" dirty="0"/>
+              <a:t>Exe</a:t>
+            </a:r>
+            <a:r>
+              <a:rPr lang="ja-JP" altLang="en-US" sz="2400" dirty="0"/>
+              <a:t>フォルダに入れています。</a:t>
             </a:r>
             <a:endParaRPr lang="en-US" altLang="ja-JP" sz="2400" dirty="0"/>
           </a:p>
           <a:p>
             <a:r>
               <a:rPr lang="ja-JP" altLang="en-US" sz="2400" dirty="0"/>
-              <a:t>最初に数字を入力させて対応したモードで次の処理に進む</a:t>
+              <a:t>細かい仕様は、それを見ながら調べましょう。</a:t>
             </a:r>
             <a:endParaRPr lang="en-US" altLang="ja-JP" sz="2400" dirty="0"/>
           </a:p>
@@ -3838,7 +3878,7 @@
         <p:spPr>
           <a:xfrm>
             <a:off x="567542" y="1189161"/>
-            <a:ext cx="11325536" cy="3046988"/>
+            <a:ext cx="6955750" cy="2677656"/>
           </a:xfrm>
           <a:prstGeom prst="rect">
             <a:avLst/>
@@ -3853,22 +3893,7 @@
           <a:p>
             <a:r>
               <a:rPr lang="ja-JP" altLang="en-US" sz="2400" dirty="0"/>
-              <a:t>これまで学習したことを振り返りながら、簡単な</a:t>
-            </a:r>
-            <a:r>
-              <a:rPr lang="en-US" altLang="ja-JP" sz="2400" dirty="0"/>
-              <a:t>ATM</a:t>
-            </a:r>
-            <a:r>
-              <a:rPr lang="ja-JP" altLang="en-US" sz="2400" dirty="0"/>
-              <a:t>システムを作りましょう。</a:t>
-            </a:r>
-            <a:endParaRPr lang="en-US" altLang="ja-JP" sz="2400" dirty="0"/>
-          </a:p>
-          <a:p>
-            <a:r>
-              <a:rPr lang="ja-JP" altLang="en-US" sz="2400" dirty="0"/>
-              <a:t>仕様は以下の通りです。</a:t>
+              <a:t>特に必要な知識です</a:t>
             </a:r>
             <a:endParaRPr lang="en-US" altLang="ja-JP" sz="2400" dirty="0"/>
           </a:p>
@@ -3882,7 +3907,7 @@
                   <a:srgbClr val="FF0000"/>
                 </a:solidFill>
               </a:rPr>
-              <a:t>■仕様（その２）</a:t>
+              <a:t>・２次元配列</a:t>
             </a:r>
             <a:endParaRPr lang="en-US" altLang="ja-JP" sz="2400" b="1" dirty="0">
               <a:solidFill>
@@ -3892,29 +3917,41 @@
           </a:p>
           <a:p>
             <a:r>
+              <a:rPr lang="ja-JP" altLang="en-US" sz="2400" b="1" dirty="0">
+                <a:solidFill>
+                  <a:srgbClr val="FF0000"/>
+                </a:solidFill>
+              </a:rPr>
+              <a:t>・関数</a:t>
+            </a:r>
+            <a:endParaRPr lang="en-US" altLang="ja-JP" sz="2400" b="1" dirty="0">
+              <a:solidFill>
+                <a:srgbClr val="FF0000"/>
+              </a:solidFill>
+            </a:endParaRPr>
+          </a:p>
+          <a:p>
+            <a:r>
+              <a:rPr lang="ja-JP" altLang="en-US" sz="2400" b="1" dirty="0">
+                <a:solidFill>
+                  <a:srgbClr val="FF0000"/>
+                </a:solidFill>
+              </a:rPr>
+              <a:t>・ローカル変数とグローバル変数</a:t>
+            </a:r>
+            <a:endParaRPr lang="en-US" altLang="ja-JP" sz="2400" b="1" dirty="0">
+              <a:solidFill>
+                <a:srgbClr val="FF0000"/>
+              </a:solidFill>
+            </a:endParaRPr>
+          </a:p>
+          <a:p>
+            <a:endParaRPr lang="en-US" altLang="ja-JP" sz="2400" dirty="0"/>
+          </a:p>
+          <a:p>
+            <a:r>
               <a:rPr lang="ja-JP" altLang="en-US" sz="2400" dirty="0"/>
-              <a:t>・口座開設モード</a:t>
-            </a:r>
-            <a:endParaRPr lang="en-US" altLang="ja-JP" sz="2400" dirty="0"/>
-          </a:p>
-          <a:p>
-            <a:r>
-              <a:rPr lang="ja-JP" altLang="en-US" sz="2400" dirty="0"/>
-              <a:t>　講座名と暗証番号を設定させる。</a:t>
-            </a:r>
-            <a:endParaRPr lang="en-US" altLang="ja-JP" sz="2400" dirty="0"/>
-          </a:p>
-          <a:p>
-            <a:r>
-              <a:rPr lang="ja-JP" altLang="en-US" sz="2400" dirty="0"/>
-              <a:t>　暗証番号は数字４桁で設定する。</a:t>
-            </a:r>
-            <a:endParaRPr lang="en-US" altLang="ja-JP" sz="2400" dirty="0"/>
-          </a:p>
-          <a:p>
-            <a:r>
-              <a:rPr lang="ja-JP" altLang="en-US" sz="2400" dirty="0"/>
-              <a:t>　設定できないものが入力された場合は設定しない。</a:t>
+              <a:t>構造体やポインターは使わなくても完成します。</a:t>
             </a:r>
             <a:endParaRPr lang="en-US" altLang="ja-JP" sz="2400" dirty="0"/>
           </a:p>
@@ -3965,7 +4002,7 @@
         <p:spPr>
           <a:xfrm>
             <a:off x="567542" y="491954"/>
-            <a:ext cx="3057247" cy="584775"/>
+            <a:ext cx="1901483" cy="584775"/>
           </a:xfrm>
           <a:prstGeom prst="rect">
             <a:avLst/>
@@ -3979,8 +4016,12 @@
           <a:lstStyle/>
           <a:p>
             <a:r>
+              <a:rPr lang="en-US" altLang="ja-JP" sz="3200" b="1" u="sng" dirty="0"/>
+              <a:t>Ex</a:t>
+            </a:r>
+            <a:r>
               <a:rPr lang="ja-JP" altLang="en-US" sz="3200" b="1" u="sng" dirty="0"/>
-              <a:t>これまでの課題</a:t>
+              <a:t>課題１</a:t>
             </a:r>
             <a:endParaRPr kumimoji="1" lang="ja-JP" altLang="en-US" sz="3200" b="1" u="sng" dirty="0"/>
           </a:p>
@@ -4001,7 +4042,7 @@
         <p:spPr>
           <a:xfrm>
             <a:off x="567542" y="1189161"/>
-            <a:ext cx="11325536" cy="2677656"/>
+            <a:ext cx="10059164" cy="1200329"/>
           </a:xfrm>
           <a:prstGeom prst="rect">
             <a:avLst/>
@@ -4016,26 +4057,27 @@
           <a:p>
             <a:r>
               <a:rPr lang="ja-JP" altLang="en-US" sz="2400" dirty="0"/>
-              <a:t>これまで学習したことを振り返りながら、簡単な</a:t>
+              <a:t>時間に余裕がある方は、</a:t>
             </a:r>
             <a:r>
               <a:rPr lang="en-US" altLang="ja-JP" sz="2400" dirty="0"/>
-              <a:t>ATM</a:t>
+              <a:t>CPU</a:t>
             </a:r>
             <a:r>
               <a:rPr lang="ja-JP" altLang="en-US" sz="2400" dirty="0"/>
-              <a:t>システムを作りましょう。</a:t>
+              <a:t>を対戦相手にしましょう。</a:t>
             </a:r>
             <a:endParaRPr lang="en-US" altLang="ja-JP" sz="2400" dirty="0"/>
           </a:p>
           <a:p>
             <a:r>
+              <a:rPr lang="en-US" altLang="ja-JP" sz="2400" dirty="0"/>
+              <a:t>CPU</a:t>
+            </a:r>
+            <a:r>
               <a:rPr lang="ja-JP" altLang="en-US" sz="2400" dirty="0"/>
-              <a:t>仕様は以下の通りです。</a:t>
-            </a:r>
-            <a:endParaRPr lang="en-US" altLang="ja-JP" sz="2400" dirty="0"/>
-          </a:p>
-          <a:p>
+              <a:t>は必ず後攻で、ランダムにマスを埋める、くらいでも大丈夫です。</a:t>
+            </a:r>
             <a:endParaRPr lang="en-US" altLang="ja-JP" sz="2400" dirty="0"/>
           </a:p>
           <a:p>
@@ -4045,34 +4087,29 @@
                   <a:srgbClr val="FF0000"/>
                 </a:solidFill>
               </a:rPr>
-              <a:t>■仕様（その３）</a:t>
+              <a:t>ただし、絶対に負けない</a:t>
+            </a:r>
+            <a:r>
+              <a:rPr lang="en-US" altLang="ja-JP" sz="2400" b="1" dirty="0">
+                <a:solidFill>
+                  <a:srgbClr val="FF0000"/>
+                </a:solidFill>
+              </a:rPr>
+              <a:t>CPU</a:t>
+            </a:r>
+            <a:r>
+              <a:rPr lang="ja-JP" altLang="en-US" sz="2400" b="1" dirty="0">
+                <a:solidFill>
+                  <a:srgbClr val="FF0000"/>
+                </a:solidFill>
+              </a:rPr>
+              <a:t>は作らないこと。</a:t>
             </a:r>
             <a:endParaRPr lang="en-US" altLang="ja-JP" sz="2400" b="1" dirty="0">
               <a:solidFill>
                 <a:srgbClr val="FF0000"/>
               </a:solidFill>
             </a:endParaRPr>
-          </a:p>
-          <a:p>
-            <a:r>
-              <a:rPr lang="ja-JP" altLang="en-US" sz="2400" dirty="0"/>
-              <a:t>・預入モード</a:t>
-            </a:r>
-            <a:endParaRPr lang="en-US" altLang="ja-JP" sz="2400" dirty="0"/>
-          </a:p>
-          <a:p>
-            <a:r>
-              <a:rPr lang="ja-JP" altLang="en-US" sz="2400" dirty="0"/>
-              <a:t>　暗証番号を入力した口座に金額を加算する。</a:t>
-            </a:r>
-            <a:endParaRPr lang="en-US" altLang="ja-JP" sz="2400" dirty="0"/>
-          </a:p>
-          <a:p>
-            <a:r>
-              <a:rPr lang="ja-JP" altLang="en-US" sz="2400" dirty="0"/>
-              <a:t>　暗証番号がどの口座にも当てはまらない場合はモード選択まで戻る。</a:t>
-            </a:r>
-            <a:endParaRPr lang="en-US" altLang="ja-JP" sz="2400" dirty="0"/>
           </a:p>
         </p:txBody>
       </p:sp>
@@ -4121,7 +4158,7 @@
         <p:spPr>
           <a:xfrm>
             <a:off x="567542" y="491954"/>
-            <a:ext cx="3057247" cy="584775"/>
+            <a:ext cx="1901483" cy="584775"/>
           </a:xfrm>
           <a:prstGeom prst="rect">
             <a:avLst/>
@@ -4135,8 +4172,12 @@
           <a:lstStyle/>
           <a:p>
             <a:r>
+              <a:rPr lang="en-US" altLang="ja-JP" sz="3200" b="1" u="sng" dirty="0"/>
+              <a:t>Ex</a:t>
+            </a:r>
+            <a:r>
               <a:rPr lang="ja-JP" altLang="en-US" sz="3200" b="1" u="sng" dirty="0"/>
-              <a:t>これまでの課題</a:t>
+              <a:t>課題２</a:t>
             </a:r>
             <a:endParaRPr kumimoji="1" lang="ja-JP" altLang="en-US" sz="3200" b="1" u="sng" dirty="0"/>
           </a:p>
@@ -4157,7 +4198,7 @@
         <p:spPr>
           <a:xfrm>
             <a:off x="567542" y="1189161"/>
-            <a:ext cx="11325536" cy="3785652"/>
+            <a:ext cx="8186857" cy="3046988"/>
           </a:xfrm>
           <a:prstGeom prst="rect">
             <a:avLst/>
@@ -4172,22 +4213,7 @@
           <a:p>
             <a:r>
               <a:rPr lang="ja-JP" altLang="en-US" sz="2400" dirty="0"/>
-              <a:t>これまで学習したことを振り返りながら、簡単な</a:t>
-            </a:r>
-            <a:r>
-              <a:rPr lang="en-US" altLang="ja-JP" sz="2400" dirty="0"/>
-              <a:t>ATM</a:t>
-            </a:r>
-            <a:r>
-              <a:rPr lang="ja-JP" altLang="en-US" sz="2400" dirty="0"/>
-              <a:t>システムを作りましょう。</a:t>
-            </a:r>
-            <a:endParaRPr lang="en-US" altLang="ja-JP" sz="2400" dirty="0"/>
-          </a:p>
-          <a:p>
-            <a:r>
-              <a:rPr lang="ja-JP" altLang="en-US" sz="2400" dirty="0"/>
-              <a:t>仕様は以下の通りです。</a:t>
+              <a:t>さらに時間に余裕がある方は、五目並べを作りましょう。</a:t>
             </a:r>
             <a:endParaRPr lang="en-US" altLang="ja-JP" sz="2400" dirty="0"/>
           </a:p>
@@ -4201,7 +4227,7 @@
                   <a:srgbClr val="FF0000"/>
                 </a:solidFill>
               </a:rPr>
-              <a:t>■仕様（その４）</a:t>
+              <a:t>■五目並べとは</a:t>
             </a:r>
             <a:endParaRPr lang="en-US" altLang="ja-JP" sz="2400" b="1" dirty="0">
               <a:solidFill>
@@ -4212,21 +4238,45 @@
           <a:p>
             <a:r>
               <a:rPr lang="ja-JP" altLang="en-US" sz="2400" dirty="0"/>
-              <a:t>・引出モード</a:t>
+              <a:t>・二人対戦</a:t>
             </a:r>
             <a:endParaRPr lang="en-US" altLang="ja-JP" sz="2400" dirty="0"/>
           </a:p>
           <a:p>
             <a:r>
               <a:rPr lang="ja-JP" altLang="en-US" sz="2400" dirty="0"/>
-              <a:t>　暗証番号を入力した口座から指定した金額を減算する。</a:t>
+              <a:t>・先攻は〇、後攻は</a:t>
+            </a:r>
+            <a:r>
+              <a:rPr lang="en-US" altLang="ja-JP" sz="2400" dirty="0"/>
+              <a:t>×</a:t>
+            </a:r>
+            <a:r>
+              <a:rPr lang="ja-JP" altLang="en-US" sz="2400" dirty="0"/>
+              <a:t>を</a:t>
+            </a:r>
+            <a:r>
+              <a:rPr lang="en-US" altLang="ja-JP" sz="2400" dirty="0"/>
+              <a:t>10</a:t>
+            </a:r>
+            <a:r>
+              <a:rPr lang="ja-JP" altLang="en-US" sz="2400" dirty="0"/>
+              <a:t>ｘ</a:t>
+            </a:r>
+            <a:r>
+              <a:rPr lang="en-US" altLang="ja-JP" sz="2400" dirty="0"/>
+              <a:t>10</a:t>
+            </a:r>
+            <a:r>
+              <a:rPr lang="ja-JP" altLang="en-US" sz="2400" dirty="0"/>
+              <a:t>の盤面に書く</a:t>
             </a:r>
             <a:endParaRPr lang="en-US" altLang="ja-JP" sz="2400" dirty="0"/>
           </a:p>
           <a:p>
             <a:r>
               <a:rPr lang="ja-JP" altLang="en-US" sz="2400" dirty="0"/>
-              <a:t>　暗証番号がどの口座にも当てはまらない場合はモード選択まで戻る。</a:t>
+              <a:t>・自分のマークが縦横斜めに５個並んだら勝ち</a:t>
             </a:r>
             <a:endParaRPr lang="en-US" altLang="ja-JP" sz="2400" dirty="0"/>
           </a:p>
@@ -4234,12 +4284,9 @@
             <a:endParaRPr lang="en-US" altLang="ja-JP" sz="2400" dirty="0"/>
           </a:p>
           <a:p>
-            <a:endParaRPr lang="en-US" altLang="ja-JP" sz="2400" dirty="0"/>
-          </a:p>
-          <a:p>
-            <a:r>
-              <a:rPr lang="ja-JP" altLang="en-US" sz="2400"/>
-              <a:t>そのほか詳細な動作はサンプルを確認しましょう。</a:t>
+            <a:r>
+              <a:rPr lang="ja-JP" altLang="en-US" sz="2400" dirty="0"/>
+              <a:t>細かいルールはネットで調べてみましょう</a:t>
             </a:r>
             <a:endParaRPr lang="en-US" altLang="ja-JP" sz="2400" dirty="0"/>
           </a:p>
@@ -4248,7 +4295,7 @@
     </p:spTree>
     <p:extLst>
       <p:ext uri="{BB962C8B-B14F-4D97-AF65-F5344CB8AC3E}">
-        <p14:creationId xmlns:p14="http://schemas.microsoft.com/office/powerpoint/2010/main" val="1208416802"/>
+        <p14:creationId xmlns:p14="http://schemas.microsoft.com/office/powerpoint/2010/main" val="2003197678"/>
       </p:ext>
     </p:extLst>
   </p:cSld>
